--- a/decks/day1/module-2-foundry-portal.pptx
+++ b/decks/day1/module-2-foundry-portal.pptx
@@ -1174,7 +1174,7 @@
 • SDK = for programmatic operations from your code (creating agents, indexes, etc.)
 • Terraform is a common default for IaC-first teams — out of scope for this workshop's content
 • In today's lab: Part A creates the Prompt agent with the SDK, not the portal
-• Day 5 deployment: az / azd paths lead, not portal deploy</a:t>
+• Day 5 assesses production readiness and does not add a deployment exercise</a:t>
             </a:r>
             <a:endParaRPr lang="en-US" dirty="0"/>
           </a:p>
